--- a/ゲーム科2年/00_前期/ゲーム開発Ⅱ/01_Unityでステージエディタ.pptx
+++ b/ゲーム科2年/00_前期/ゲーム開発Ⅱ/01_Unityでステージエディタ.pptx
@@ -53,6 +53,7 @@
     <p:sldId id="303" r:id="rId47"/>
     <p:sldId id="304" r:id="rId48"/>
     <p:sldId id="305" r:id="rId49"/>
+    <p:sldId id="307" r:id="rId50"/>
   </p:sldIdLst>
   <p:sldSz cx="12192000" cy="6858000"/>
   <p:notesSz cx="6858000" cy="9144000"/>
@@ -306,7 +307,7 @@
           <a:p>
             <a:fld id="{E9CC885B-4903-4D54-9A93-00025F12DED9}" type="datetimeFigureOut">
               <a:rPr kumimoji="1" lang="ja-JP" altLang="en-US" smtClean="0"/>
-              <a:t>2026/1/29</a:t>
+              <a:t>2026/2/9</a:t>
             </a:fld>
             <a:endParaRPr kumimoji="1" lang="ja-JP" altLang="en-US"/>
           </a:p>
@@ -536,7 +537,7 @@
           <a:p>
             <a:fld id="{E9CC885B-4903-4D54-9A93-00025F12DED9}" type="datetimeFigureOut">
               <a:rPr kumimoji="1" lang="ja-JP" altLang="en-US" smtClean="0"/>
-              <a:t>2026/1/29</a:t>
+              <a:t>2026/2/9</a:t>
             </a:fld>
             <a:endParaRPr kumimoji="1" lang="ja-JP" altLang="en-US"/>
           </a:p>
@@ -776,7 +777,7 @@
           <a:p>
             <a:fld id="{E9CC885B-4903-4D54-9A93-00025F12DED9}" type="datetimeFigureOut">
               <a:rPr kumimoji="1" lang="ja-JP" altLang="en-US" smtClean="0"/>
-              <a:t>2026/1/29</a:t>
+              <a:t>2026/2/9</a:t>
             </a:fld>
             <a:endParaRPr kumimoji="1" lang="ja-JP" altLang="en-US"/>
           </a:p>
@@ -1006,7 +1007,7 @@
           <a:p>
             <a:fld id="{E9CC885B-4903-4D54-9A93-00025F12DED9}" type="datetimeFigureOut">
               <a:rPr kumimoji="1" lang="ja-JP" altLang="en-US" smtClean="0"/>
-              <a:t>2026/1/29</a:t>
+              <a:t>2026/2/9</a:t>
             </a:fld>
             <a:endParaRPr kumimoji="1" lang="ja-JP" altLang="en-US"/>
           </a:p>
@@ -1281,7 +1282,7 @@
           <a:p>
             <a:fld id="{E9CC885B-4903-4D54-9A93-00025F12DED9}" type="datetimeFigureOut">
               <a:rPr kumimoji="1" lang="ja-JP" altLang="en-US" smtClean="0"/>
-              <a:t>2026/1/29</a:t>
+              <a:t>2026/2/9</a:t>
             </a:fld>
             <a:endParaRPr kumimoji="1" lang="ja-JP" altLang="en-US"/>
           </a:p>
@@ -1610,7 +1611,7 @@
           <a:p>
             <a:fld id="{E9CC885B-4903-4D54-9A93-00025F12DED9}" type="datetimeFigureOut">
               <a:rPr kumimoji="1" lang="ja-JP" altLang="en-US" smtClean="0"/>
-              <a:t>2026/1/29</a:t>
+              <a:t>2026/2/9</a:t>
             </a:fld>
             <a:endParaRPr kumimoji="1" lang="ja-JP" altLang="en-US"/>
           </a:p>
@@ -2086,7 +2087,7 @@
           <a:p>
             <a:fld id="{E9CC885B-4903-4D54-9A93-00025F12DED9}" type="datetimeFigureOut">
               <a:rPr kumimoji="1" lang="ja-JP" altLang="en-US" smtClean="0"/>
-              <a:t>2026/1/29</a:t>
+              <a:t>2026/2/9</a:t>
             </a:fld>
             <a:endParaRPr kumimoji="1" lang="ja-JP" altLang="en-US"/>
           </a:p>
@@ -2227,7 +2228,7 @@
           <a:p>
             <a:fld id="{E9CC885B-4903-4D54-9A93-00025F12DED9}" type="datetimeFigureOut">
               <a:rPr kumimoji="1" lang="ja-JP" altLang="en-US" smtClean="0"/>
-              <a:t>2026/1/29</a:t>
+              <a:t>2026/2/9</a:t>
             </a:fld>
             <a:endParaRPr kumimoji="1" lang="ja-JP" altLang="en-US"/>
           </a:p>
@@ -2340,7 +2341,7 @@
           <a:p>
             <a:fld id="{E9CC885B-4903-4D54-9A93-00025F12DED9}" type="datetimeFigureOut">
               <a:rPr kumimoji="1" lang="ja-JP" altLang="en-US" smtClean="0"/>
-              <a:t>2026/1/29</a:t>
+              <a:t>2026/2/9</a:t>
             </a:fld>
             <a:endParaRPr kumimoji="1" lang="ja-JP" altLang="en-US"/>
           </a:p>
@@ -2683,7 +2684,7 @@
           <a:p>
             <a:fld id="{E9CC885B-4903-4D54-9A93-00025F12DED9}" type="datetimeFigureOut">
               <a:rPr kumimoji="1" lang="ja-JP" altLang="en-US" smtClean="0"/>
-              <a:t>2026/1/29</a:t>
+              <a:t>2026/2/9</a:t>
             </a:fld>
             <a:endParaRPr kumimoji="1" lang="ja-JP" altLang="en-US"/>
           </a:p>
@@ -2971,7 +2972,7 @@
           <a:p>
             <a:fld id="{E9CC885B-4903-4D54-9A93-00025F12DED9}" type="datetimeFigureOut">
               <a:rPr kumimoji="1" lang="ja-JP" altLang="en-US" smtClean="0"/>
-              <a:t>2026/1/29</a:t>
+              <a:t>2026/2/9</a:t>
             </a:fld>
             <a:endParaRPr kumimoji="1" lang="ja-JP" altLang="en-US"/>
           </a:p>
@@ -3244,7 +3245,7 @@
           <a:p>
             <a:fld id="{E9CC885B-4903-4D54-9A93-00025F12DED9}" type="datetimeFigureOut">
               <a:rPr kumimoji="1" lang="ja-JP" altLang="en-US" smtClean="0"/>
-              <a:t>2026/1/29</a:t>
+              <a:t>2026/2/9</a:t>
             </a:fld>
             <a:endParaRPr kumimoji="1" lang="ja-JP" altLang="en-US"/>
           </a:p>
@@ -10769,6 +10770,216 @@
 </p:sld>
 </file>
 
+<file path=ppt/slides/slide49.xml><?xml version="1.0" encoding="utf-8"?>
+<p:sld xmlns:a="http://schemas.openxmlformats.org/drawingml/2006/main" xmlns:r="http://schemas.openxmlformats.org/officeDocument/2006/relationships" xmlns:p="http://schemas.openxmlformats.org/presentationml/2006/main">
+  <p:cSld>
+    <p:spTree>
+      <p:nvGrpSpPr>
+        <p:cNvPr id="1" name=""/>
+        <p:cNvGrpSpPr/>
+        <p:nvPr/>
+      </p:nvGrpSpPr>
+      <p:grpSpPr>
+        <a:xfrm>
+          <a:off x="0" y="0"/>
+          <a:ext cx="0" cy="0"/>
+          <a:chOff x="0" y="0"/>
+          <a:chExt cx="0" cy="0"/>
+        </a:xfrm>
+      </p:grpSpPr>
+      <p:sp>
+        <p:nvSpPr>
+          <p:cNvPr id="4" name="テキスト ボックス 3">
+            <a:extLst>
+              <a:ext uri="{FF2B5EF4-FFF2-40B4-BE49-F238E27FC236}">
+                <a16:creationId xmlns:a16="http://schemas.microsoft.com/office/drawing/2014/main" id="{5A13BF46-B8C5-48AA-8308-C9ECFF431A18}"/>
+              </a:ext>
+            </a:extLst>
+          </p:cNvPr>
+          <p:cNvSpPr txBox="1"/>
+          <p:nvPr/>
+        </p:nvSpPr>
+        <p:spPr>
+          <a:xfrm>
+            <a:off x="567542" y="491954"/>
+            <a:ext cx="1415772" cy="584775"/>
+          </a:xfrm>
+          <a:prstGeom prst="rect">
+            <a:avLst/>
+          </a:prstGeom>
+          <a:noFill/>
+        </p:spPr>
+        <p:txBody>
+          <a:bodyPr wrap="none" rtlCol="0">
+            <a:spAutoFit/>
+          </a:bodyPr>
+          <a:lstStyle/>
+          <a:p>
+            <a:r>
+              <a:rPr kumimoji="1" lang="ja-JP" altLang="en-US" sz="3200" b="1" u="sng" dirty="0"/>
+              <a:t>改善点</a:t>
+            </a:r>
+            <a:endParaRPr kumimoji="1" lang="en-US" altLang="ja-JP" sz="3200" b="1" u="sng" dirty="0"/>
+          </a:p>
+        </p:txBody>
+      </p:sp>
+      <p:sp>
+        <p:nvSpPr>
+          <p:cNvPr id="6" name="テキスト ボックス 5">
+            <a:extLst>
+              <a:ext uri="{FF2B5EF4-FFF2-40B4-BE49-F238E27FC236}">
+                <a16:creationId xmlns:a16="http://schemas.microsoft.com/office/drawing/2014/main" id="{55830AD6-028B-4C4E-80BF-B70DFC1C3A46}"/>
+              </a:ext>
+            </a:extLst>
+          </p:cNvPr>
+          <p:cNvSpPr txBox="1"/>
+          <p:nvPr/>
+        </p:nvSpPr>
+        <p:spPr>
+          <a:xfrm>
+            <a:off x="567542" y="1216429"/>
+            <a:ext cx="8393644" cy="4893647"/>
+          </a:xfrm>
+          <a:prstGeom prst="rect">
+            <a:avLst/>
+          </a:prstGeom>
+          <a:noFill/>
+        </p:spPr>
+        <p:txBody>
+          <a:bodyPr wrap="none" rtlCol="0">
+            <a:spAutoFit/>
+          </a:bodyPr>
+          <a:lstStyle/>
+          <a:p>
+            <a:r>
+              <a:rPr lang="ja-JP" altLang="en-US" sz="2400" dirty="0"/>
+              <a:t>あくまで</a:t>
+            </a:r>
+            <a:r>
+              <a:rPr lang="ja-JP" altLang="en-US" sz="2400" b="1" dirty="0">
+                <a:solidFill>
+                  <a:srgbClr val="FF0000"/>
+                </a:solidFill>
+              </a:rPr>
+              <a:t>配置のみ</a:t>
+            </a:r>
+            <a:r>
+              <a:rPr lang="ja-JP" altLang="en-US" sz="2400" dirty="0"/>
+              <a:t>なので、</a:t>
+            </a:r>
+            <a:endParaRPr lang="en-US" altLang="ja-JP" sz="2400" dirty="0"/>
+          </a:p>
+          <a:p>
+            <a:r>
+              <a:rPr lang="ja-JP" altLang="en-US" sz="2400" dirty="0"/>
+              <a:t>回転や拡縮をしても当たり判定には影響がありません。</a:t>
+            </a:r>
+            <a:endParaRPr lang="en-US" altLang="ja-JP" sz="2400" dirty="0"/>
+          </a:p>
+          <a:p>
+            <a:endParaRPr lang="en-US" altLang="ja-JP" sz="2400" dirty="0"/>
+          </a:p>
+          <a:p>
+            <a:r>
+              <a:rPr lang="ja-JP" altLang="en-US" sz="2400" dirty="0"/>
+              <a:t>当たり判定まで対応するとなると、非常に大変ですので、</a:t>
+            </a:r>
+            <a:endParaRPr lang="en-US" altLang="ja-JP" sz="2400" dirty="0"/>
+          </a:p>
+          <a:p>
+            <a:r>
+              <a:rPr lang="ja-JP" altLang="en-US" sz="2400" dirty="0"/>
+              <a:t>どのようにするかを、あらかじめ考えておきましょう。</a:t>
+            </a:r>
+            <a:endParaRPr lang="en-US" altLang="ja-JP" sz="2400" dirty="0"/>
+          </a:p>
+          <a:p>
+            <a:endParaRPr lang="en-US" altLang="ja-JP" sz="2400" dirty="0"/>
+          </a:p>
+          <a:p>
+            <a:r>
+              <a:rPr lang="ja-JP" altLang="en-US" sz="2400" b="1" dirty="0">
+                <a:solidFill>
+                  <a:srgbClr val="FF0000"/>
+                </a:solidFill>
+              </a:rPr>
+              <a:t>■対応例</a:t>
+            </a:r>
+            <a:endParaRPr lang="en-US" altLang="ja-JP" sz="2400" b="1" dirty="0">
+              <a:solidFill>
+                <a:srgbClr val="FF0000"/>
+              </a:solidFill>
+            </a:endParaRPr>
+          </a:p>
+          <a:p>
+            <a:r>
+              <a:rPr lang="ja-JP" altLang="en-US" sz="2400" dirty="0"/>
+              <a:t>・回転、拡縮は使用しない。</a:t>
+            </a:r>
+            <a:endParaRPr lang="en-US" altLang="ja-JP" sz="2400" dirty="0"/>
+          </a:p>
+          <a:p>
+            <a:r>
+              <a:rPr lang="ja-JP" altLang="en-US" sz="2400" dirty="0"/>
+              <a:t>　・必要であれば別モデルで作る</a:t>
+            </a:r>
+            <a:endParaRPr lang="en-US" altLang="ja-JP" sz="2400" dirty="0"/>
+          </a:p>
+          <a:p>
+            <a:endParaRPr lang="en-US" altLang="ja-JP" sz="2400" dirty="0"/>
+          </a:p>
+          <a:p>
+            <a:r>
+              <a:rPr lang="ja-JP" altLang="en-US" sz="2400" dirty="0"/>
+              <a:t>・回転、拡縮も対応する</a:t>
+            </a:r>
+            <a:endParaRPr lang="en-US" altLang="ja-JP" sz="2400" dirty="0"/>
+          </a:p>
+          <a:p>
+            <a:r>
+              <a:rPr lang="ja-JP" altLang="en-US" sz="2400" dirty="0"/>
+              <a:t>　・最低限</a:t>
+            </a:r>
+            <a:r>
+              <a:rPr lang="en-US" altLang="ja-JP" sz="2400" dirty="0"/>
+              <a:t>OBB</a:t>
+            </a:r>
+            <a:r>
+              <a:rPr lang="ja-JP" altLang="en-US" sz="2400" dirty="0"/>
+              <a:t>（有向ボックス判定）が必要になる</a:t>
+            </a:r>
+            <a:endParaRPr lang="en-US" altLang="ja-JP" sz="2400" dirty="0"/>
+          </a:p>
+          <a:p>
+            <a:r>
+              <a:rPr lang="ja-JP" altLang="en-US" sz="2400" dirty="0"/>
+              <a:t>　・配置数の少ないものは</a:t>
+            </a:r>
+            <a:r>
+              <a:rPr lang="en-US" altLang="ja-JP" sz="2400" dirty="0" err="1"/>
+              <a:t>DxLib</a:t>
+            </a:r>
+            <a:r>
+              <a:rPr lang="ja-JP" altLang="en-US" sz="2400"/>
+              <a:t>の当たり判定でも対応可能</a:t>
+            </a:r>
+            <a:endParaRPr lang="en-US" altLang="ja-JP" sz="2400" dirty="0"/>
+          </a:p>
+        </p:txBody>
+      </p:sp>
+    </p:spTree>
+    <p:extLst>
+      <p:ext uri="{BB962C8B-B14F-4D97-AF65-F5344CB8AC3E}">
+        <p14:creationId xmlns:p14="http://schemas.microsoft.com/office/powerpoint/2010/main" val="2667099649"/>
+      </p:ext>
+    </p:extLst>
+  </p:cSld>
+  <p:clrMapOvr>
+    <a:masterClrMapping/>
+  </p:clrMapOvr>
+</p:sld>
+</file>
+
 <file path=ppt/slides/slide5.xml><?xml version="1.0" encoding="utf-8"?>
 <p:sld xmlns:a="http://schemas.openxmlformats.org/drawingml/2006/main" xmlns:r="http://schemas.openxmlformats.org/officeDocument/2006/relationships" xmlns:p="http://schemas.openxmlformats.org/presentationml/2006/main">
   <p:cSld>

--- a/ゲーム科2年/00_前期/ゲーム開発Ⅱ/01_Unityでステージエディタ.pptx
+++ b/ゲーム科2年/00_前期/ゲーム開発Ⅱ/01_Unityでステージエディタ.pptx
@@ -307,7 +307,7 @@
           <a:p>
             <a:fld id="{E9CC885B-4903-4D54-9A93-00025F12DED9}" type="datetimeFigureOut">
               <a:rPr kumimoji="1" lang="ja-JP" altLang="en-US" smtClean="0"/>
-              <a:t>2026/2/9</a:t>
+              <a:t>2026/2/25</a:t>
             </a:fld>
             <a:endParaRPr kumimoji="1" lang="ja-JP" altLang="en-US"/>
           </a:p>
@@ -537,7 +537,7 @@
           <a:p>
             <a:fld id="{E9CC885B-4903-4D54-9A93-00025F12DED9}" type="datetimeFigureOut">
               <a:rPr kumimoji="1" lang="ja-JP" altLang="en-US" smtClean="0"/>
-              <a:t>2026/2/9</a:t>
+              <a:t>2026/2/25</a:t>
             </a:fld>
             <a:endParaRPr kumimoji="1" lang="ja-JP" altLang="en-US"/>
           </a:p>
@@ -777,7 +777,7 @@
           <a:p>
             <a:fld id="{E9CC885B-4903-4D54-9A93-00025F12DED9}" type="datetimeFigureOut">
               <a:rPr kumimoji="1" lang="ja-JP" altLang="en-US" smtClean="0"/>
-              <a:t>2026/2/9</a:t>
+              <a:t>2026/2/25</a:t>
             </a:fld>
             <a:endParaRPr kumimoji="1" lang="ja-JP" altLang="en-US"/>
           </a:p>
@@ -1007,7 +1007,7 @@
           <a:p>
             <a:fld id="{E9CC885B-4903-4D54-9A93-00025F12DED9}" type="datetimeFigureOut">
               <a:rPr kumimoji="1" lang="ja-JP" altLang="en-US" smtClean="0"/>
-              <a:t>2026/2/9</a:t>
+              <a:t>2026/2/25</a:t>
             </a:fld>
             <a:endParaRPr kumimoji="1" lang="ja-JP" altLang="en-US"/>
           </a:p>
@@ -1282,7 +1282,7 @@
           <a:p>
             <a:fld id="{E9CC885B-4903-4D54-9A93-00025F12DED9}" type="datetimeFigureOut">
               <a:rPr kumimoji="1" lang="ja-JP" altLang="en-US" smtClean="0"/>
-              <a:t>2026/2/9</a:t>
+              <a:t>2026/2/25</a:t>
             </a:fld>
             <a:endParaRPr kumimoji="1" lang="ja-JP" altLang="en-US"/>
           </a:p>
@@ -1611,7 +1611,7 @@
           <a:p>
             <a:fld id="{E9CC885B-4903-4D54-9A93-00025F12DED9}" type="datetimeFigureOut">
               <a:rPr kumimoji="1" lang="ja-JP" altLang="en-US" smtClean="0"/>
-              <a:t>2026/2/9</a:t>
+              <a:t>2026/2/25</a:t>
             </a:fld>
             <a:endParaRPr kumimoji="1" lang="ja-JP" altLang="en-US"/>
           </a:p>
@@ -2087,7 +2087,7 @@
           <a:p>
             <a:fld id="{E9CC885B-4903-4D54-9A93-00025F12DED9}" type="datetimeFigureOut">
               <a:rPr kumimoji="1" lang="ja-JP" altLang="en-US" smtClean="0"/>
-              <a:t>2026/2/9</a:t>
+              <a:t>2026/2/25</a:t>
             </a:fld>
             <a:endParaRPr kumimoji="1" lang="ja-JP" altLang="en-US"/>
           </a:p>
@@ -2228,7 +2228,7 @@
           <a:p>
             <a:fld id="{E9CC885B-4903-4D54-9A93-00025F12DED9}" type="datetimeFigureOut">
               <a:rPr kumimoji="1" lang="ja-JP" altLang="en-US" smtClean="0"/>
-              <a:t>2026/2/9</a:t>
+              <a:t>2026/2/25</a:t>
             </a:fld>
             <a:endParaRPr kumimoji="1" lang="ja-JP" altLang="en-US"/>
           </a:p>
@@ -2341,7 +2341,7 @@
           <a:p>
             <a:fld id="{E9CC885B-4903-4D54-9A93-00025F12DED9}" type="datetimeFigureOut">
               <a:rPr kumimoji="1" lang="ja-JP" altLang="en-US" smtClean="0"/>
-              <a:t>2026/2/9</a:t>
+              <a:t>2026/2/25</a:t>
             </a:fld>
             <a:endParaRPr kumimoji="1" lang="ja-JP" altLang="en-US"/>
           </a:p>
@@ -2684,7 +2684,7 @@
           <a:p>
             <a:fld id="{E9CC885B-4903-4D54-9A93-00025F12DED9}" type="datetimeFigureOut">
               <a:rPr kumimoji="1" lang="ja-JP" altLang="en-US" smtClean="0"/>
-              <a:t>2026/2/9</a:t>
+              <a:t>2026/2/25</a:t>
             </a:fld>
             <a:endParaRPr kumimoji="1" lang="ja-JP" altLang="en-US"/>
           </a:p>
@@ -2972,7 +2972,7 @@
           <a:p>
             <a:fld id="{E9CC885B-4903-4D54-9A93-00025F12DED9}" type="datetimeFigureOut">
               <a:rPr kumimoji="1" lang="ja-JP" altLang="en-US" smtClean="0"/>
-              <a:t>2026/2/9</a:t>
+              <a:t>2026/2/25</a:t>
             </a:fld>
             <a:endParaRPr kumimoji="1" lang="ja-JP" altLang="en-US"/>
           </a:p>
@@ -3245,7 +3245,7 @@
           <a:p>
             <a:fld id="{E9CC885B-4903-4D54-9A93-00025F12DED9}" type="datetimeFigureOut">
               <a:rPr kumimoji="1" lang="ja-JP" altLang="en-US" smtClean="0"/>
-              <a:t>2026/2/9</a:t>
+              <a:t>2026/2/25</a:t>
             </a:fld>
             <a:endParaRPr kumimoji="1" lang="ja-JP" altLang="en-US"/>
           </a:p>
@@ -7030,6 +7030,53 @@
           </a:prstGeom>
         </p:spPr>
       </p:pic>
+      <p:sp>
+        <p:nvSpPr>
+          <p:cNvPr id="7" name="テキスト ボックス 6">
+            <a:extLst>
+              <a:ext uri="{FF2B5EF4-FFF2-40B4-BE49-F238E27FC236}">
+                <a16:creationId xmlns:a16="http://schemas.microsoft.com/office/drawing/2014/main" id="{58AF8D64-116A-4104-A298-35D57BA946D4}"/>
+              </a:ext>
+            </a:extLst>
+          </p:cNvPr>
+          <p:cNvSpPr txBox="1"/>
+          <p:nvPr/>
+        </p:nvSpPr>
+        <p:spPr>
+          <a:xfrm>
+            <a:off x="567541" y="3660287"/>
+            <a:ext cx="8186857" cy="830997"/>
+          </a:xfrm>
+          <a:prstGeom prst="rect">
+            <a:avLst/>
+          </a:prstGeom>
+          <a:noFill/>
+        </p:spPr>
+        <p:txBody>
+          <a:bodyPr wrap="none" rtlCol="0">
+            <a:spAutoFit/>
+          </a:bodyPr>
+          <a:lstStyle/>
+          <a:p>
+            <a:r>
+              <a:rPr kumimoji="1" lang="en-US" altLang="ja-JP" sz="2400" b="1" dirty="0"/>
+              <a:t>※</a:t>
+            </a:r>
+            <a:r>
+              <a:rPr kumimoji="1" lang="ja-JP" altLang="en-US" sz="2400" b="1" dirty="0"/>
+              <a:t>ラップとはいろんなデータを一つにまとめること。</a:t>
+            </a:r>
+            <a:endParaRPr kumimoji="1" lang="en-US" altLang="ja-JP" sz="2400" b="1" dirty="0"/>
+          </a:p>
+          <a:p>
+            <a:r>
+              <a:rPr lang="ja-JP" altLang="en-US" sz="2400" b="1" dirty="0"/>
+              <a:t>　ごはんやおかずの入った弁当にラップをするイメージ。</a:t>
+            </a:r>
+            <a:endParaRPr kumimoji="1" lang="en-US" altLang="ja-JP" sz="2400" b="1" dirty="0"/>
+          </a:p>
+        </p:txBody>
+      </p:sp>
     </p:spTree>
     <p:extLst>
       <p:ext uri="{BB962C8B-B14F-4D97-AF65-F5344CB8AC3E}">
@@ -10960,7 +11007,7 @@
               <a:t>DxLib</a:t>
             </a:r>
             <a:r>
-              <a:rPr lang="ja-JP" altLang="en-US" sz="2400"/>
+              <a:rPr lang="ja-JP" altLang="en-US" sz="2400" dirty="0"/>
               <a:t>の当たり判定でも対応可能</a:t>
             </a:r>
             <a:endParaRPr lang="en-US" altLang="ja-JP" sz="2400" dirty="0"/>

--- a/ゲーム科2年/00_前期/ゲーム開発Ⅱ/01_Unityでステージエディタ.pptx
+++ b/ゲーム科2年/00_前期/ゲーム開発Ⅱ/01_Unityでステージエディタ.pptx
@@ -307,7 +307,7 @@
           <a:p>
             <a:fld id="{E9CC885B-4903-4D54-9A93-00025F12DED9}" type="datetimeFigureOut">
               <a:rPr kumimoji="1" lang="ja-JP" altLang="en-US" smtClean="0"/>
-              <a:t>2026/2/25</a:t>
+              <a:t>2026/4/27</a:t>
             </a:fld>
             <a:endParaRPr kumimoji="1" lang="ja-JP" altLang="en-US"/>
           </a:p>
@@ -537,7 +537,7 @@
           <a:p>
             <a:fld id="{E9CC885B-4903-4D54-9A93-00025F12DED9}" type="datetimeFigureOut">
               <a:rPr kumimoji="1" lang="ja-JP" altLang="en-US" smtClean="0"/>
-              <a:t>2026/2/25</a:t>
+              <a:t>2026/4/27</a:t>
             </a:fld>
             <a:endParaRPr kumimoji="1" lang="ja-JP" altLang="en-US"/>
           </a:p>
@@ -777,7 +777,7 @@
           <a:p>
             <a:fld id="{E9CC885B-4903-4D54-9A93-00025F12DED9}" type="datetimeFigureOut">
               <a:rPr kumimoji="1" lang="ja-JP" altLang="en-US" smtClean="0"/>
-              <a:t>2026/2/25</a:t>
+              <a:t>2026/4/27</a:t>
             </a:fld>
             <a:endParaRPr kumimoji="1" lang="ja-JP" altLang="en-US"/>
           </a:p>
@@ -1007,7 +1007,7 @@
           <a:p>
             <a:fld id="{E9CC885B-4903-4D54-9A93-00025F12DED9}" type="datetimeFigureOut">
               <a:rPr kumimoji="1" lang="ja-JP" altLang="en-US" smtClean="0"/>
-              <a:t>2026/2/25</a:t>
+              <a:t>2026/4/27</a:t>
             </a:fld>
             <a:endParaRPr kumimoji="1" lang="ja-JP" altLang="en-US"/>
           </a:p>
@@ -1282,7 +1282,7 @@
           <a:p>
             <a:fld id="{E9CC885B-4903-4D54-9A93-00025F12DED9}" type="datetimeFigureOut">
               <a:rPr kumimoji="1" lang="ja-JP" altLang="en-US" smtClean="0"/>
-              <a:t>2026/2/25</a:t>
+              <a:t>2026/4/27</a:t>
             </a:fld>
             <a:endParaRPr kumimoji="1" lang="ja-JP" altLang="en-US"/>
           </a:p>
@@ -1611,7 +1611,7 @@
           <a:p>
             <a:fld id="{E9CC885B-4903-4D54-9A93-00025F12DED9}" type="datetimeFigureOut">
               <a:rPr kumimoji="1" lang="ja-JP" altLang="en-US" smtClean="0"/>
-              <a:t>2026/2/25</a:t>
+              <a:t>2026/4/27</a:t>
             </a:fld>
             <a:endParaRPr kumimoji="1" lang="ja-JP" altLang="en-US"/>
           </a:p>
@@ -2087,7 +2087,7 @@
           <a:p>
             <a:fld id="{E9CC885B-4903-4D54-9A93-00025F12DED9}" type="datetimeFigureOut">
               <a:rPr kumimoji="1" lang="ja-JP" altLang="en-US" smtClean="0"/>
-              <a:t>2026/2/25</a:t>
+              <a:t>2026/4/27</a:t>
             </a:fld>
             <a:endParaRPr kumimoji="1" lang="ja-JP" altLang="en-US"/>
           </a:p>
@@ -2228,7 +2228,7 @@
           <a:p>
             <a:fld id="{E9CC885B-4903-4D54-9A93-00025F12DED9}" type="datetimeFigureOut">
               <a:rPr kumimoji="1" lang="ja-JP" altLang="en-US" smtClean="0"/>
-              <a:t>2026/2/25</a:t>
+              <a:t>2026/4/27</a:t>
             </a:fld>
             <a:endParaRPr kumimoji="1" lang="ja-JP" altLang="en-US"/>
           </a:p>
@@ -2341,7 +2341,7 @@
           <a:p>
             <a:fld id="{E9CC885B-4903-4D54-9A93-00025F12DED9}" type="datetimeFigureOut">
               <a:rPr kumimoji="1" lang="ja-JP" altLang="en-US" smtClean="0"/>
-              <a:t>2026/2/25</a:t>
+              <a:t>2026/4/27</a:t>
             </a:fld>
             <a:endParaRPr kumimoji="1" lang="ja-JP" altLang="en-US"/>
           </a:p>
@@ -2684,7 +2684,7 @@
           <a:p>
             <a:fld id="{E9CC885B-4903-4D54-9A93-00025F12DED9}" type="datetimeFigureOut">
               <a:rPr kumimoji="1" lang="ja-JP" altLang="en-US" smtClean="0"/>
-              <a:t>2026/2/25</a:t>
+              <a:t>2026/4/27</a:t>
             </a:fld>
             <a:endParaRPr kumimoji="1" lang="ja-JP" altLang="en-US"/>
           </a:p>
@@ -2972,7 +2972,7 @@
           <a:p>
             <a:fld id="{E9CC885B-4903-4D54-9A93-00025F12DED9}" type="datetimeFigureOut">
               <a:rPr kumimoji="1" lang="ja-JP" altLang="en-US" smtClean="0"/>
-              <a:t>2026/2/25</a:t>
+              <a:t>2026/4/27</a:t>
             </a:fld>
             <a:endParaRPr kumimoji="1" lang="ja-JP" altLang="en-US"/>
           </a:p>
@@ -3245,7 +3245,7 @@
           <a:p>
             <a:fld id="{E9CC885B-4903-4D54-9A93-00025F12DED9}" type="datetimeFigureOut">
               <a:rPr kumimoji="1" lang="ja-JP" altLang="en-US" smtClean="0"/>
-              <a:t>2026/2/25</a:t>
+              <a:t>2026/4/27</a:t>
             </a:fld>
             <a:endParaRPr kumimoji="1" lang="ja-JP" altLang="en-US"/>
           </a:p>
@@ -6858,7 +6858,7 @@
           <a:p>
             <a:r>
               <a:rPr lang="ja-JP" altLang="en-US" sz="2400" dirty="0"/>
-              <a:t>以下は配置オブジェクトリストを固定配列に変化しているプログラムです。</a:t>
+              <a:t>以下は配置オブジェクトリストを固定配列に変換しているプログラムです。</a:t>
             </a:r>
             <a:endParaRPr kumimoji="1" lang="en-US" altLang="ja-JP" sz="2400" dirty="0"/>
           </a:p>

--- a/ゲーム科2年/00_前期/ゲーム開発Ⅱ/01_Unityでステージエディタ.pptx
+++ b/ゲーム科2年/00_前期/ゲーム開発Ⅱ/01_Unityでステージエディタ.pptx
@@ -307,7 +307,7 @@
           <a:p>
             <a:fld id="{E9CC885B-4903-4D54-9A93-00025F12DED9}" type="datetimeFigureOut">
               <a:rPr kumimoji="1" lang="ja-JP" altLang="en-US" smtClean="0"/>
-              <a:t>2026/4/27</a:t>
+              <a:t>2026/5/13</a:t>
             </a:fld>
             <a:endParaRPr kumimoji="1" lang="ja-JP" altLang="en-US"/>
           </a:p>
@@ -537,7 +537,7 @@
           <a:p>
             <a:fld id="{E9CC885B-4903-4D54-9A93-00025F12DED9}" type="datetimeFigureOut">
               <a:rPr kumimoji="1" lang="ja-JP" altLang="en-US" smtClean="0"/>
-              <a:t>2026/4/27</a:t>
+              <a:t>2026/5/13</a:t>
             </a:fld>
             <a:endParaRPr kumimoji="1" lang="ja-JP" altLang="en-US"/>
           </a:p>
@@ -777,7 +777,7 @@
           <a:p>
             <a:fld id="{E9CC885B-4903-4D54-9A93-00025F12DED9}" type="datetimeFigureOut">
               <a:rPr kumimoji="1" lang="ja-JP" altLang="en-US" smtClean="0"/>
-              <a:t>2026/4/27</a:t>
+              <a:t>2026/5/13</a:t>
             </a:fld>
             <a:endParaRPr kumimoji="1" lang="ja-JP" altLang="en-US"/>
           </a:p>
@@ -1007,7 +1007,7 @@
           <a:p>
             <a:fld id="{E9CC885B-4903-4D54-9A93-00025F12DED9}" type="datetimeFigureOut">
               <a:rPr kumimoji="1" lang="ja-JP" altLang="en-US" smtClean="0"/>
-              <a:t>2026/4/27</a:t>
+              <a:t>2026/5/13</a:t>
             </a:fld>
             <a:endParaRPr kumimoji="1" lang="ja-JP" altLang="en-US"/>
           </a:p>
@@ -1282,7 +1282,7 @@
           <a:p>
             <a:fld id="{E9CC885B-4903-4D54-9A93-00025F12DED9}" type="datetimeFigureOut">
               <a:rPr kumimoji="1" lang="ja-JP" altLang="en-US" smtClean="0"/>
-              <a:t>2026/4/27</a:t>
+              <a:t>2026/5/13</a:t>
             </a:fld>
             <a:endParaRPr kumimoji="1" lang="ja-JP" altLang="en-US"/>
           </a:p>
@@ -1611,7 +1611,7 @@
           <a:p>
             <a:fld id="{E9CC885B-4903-4D54-9A93-00025F12DED9}" type="datetimeFigureOut">
               <a:rPr kumimoji="1" lang="ja-JP" altLang="en-US" smtClean="0"/>
-              <a:t>2026/4/27</a:t>
+              <a:t>2026/5/13</a:t>
             </a:fld>
             <a:endParaRPr kumimoji="1" lang="ja-JP" altLang="en-US"/>
           </a:p>
@@ -2087,7 +2087,7 @@
           <a:p>
             <a:fld id="{E9CC885B-4903-4D54-9A93-00025F12DED9}" type="datetimeFigureOut">
               <a:rPr kumimoji="1" lang="ja-JP" altLang="en-US" smtClean="0"/>
-              <a:t>2026/4/27</a:t>
+              <a:t>2026/5/13</a:t>
             </a:fld>
             <a:endParaRPr kumimoji="1" lang="ja-JP" altLang="en-US"/>
           </a:p>
@@ -2228,7 +2228,7 @@
           <a:p>
             <a:fld id="{E9CC885B-4903-4D54-9A93-00025F12DED9}" type="datetimeFigureOut">
               <a:rPr kumimoji="1" lang="ja-JP" altLang="en-US" smtClean="0"/>
-              <a:t>2026/4/27</a:t>
+              <a:t>2026/5/13</a:t>
             </a:fld>
             <a:endParaRPr kumimoji="1" lang="ja-JP" altLang="en-US"/>
           </a:p>
@@ -2341,7 +2341,7 @@
           <a:p>
             <a:fld id="{E9CC885B-4903-4D54-9A93-00025F12DED9}" type="datetimeFigureOut">
               <a:rPr kumimoji="1" lang="ja-JP" altLang="en-US" smtClean="0"/>
-              <a:t>2026/4/27</a:t>
+              <a:t>2026/5/13</a:t>
             </a:fld>
             <a:endParaRPr kumimoji="1" lang="ja-JP" altLang="en-US"/>
           </a:p>
@@ -2684,7 +2684,7 @@
           <a:p>
             <a:fld id="{E9CC885B-4903-4D54-9A93-00025F12DED9}" type="datetimeFigureOut">
               <a:rPr kumimoji="1" lang="ja-JP" altLang="en-US" smtClean="0"/>
-              <a:t>2026/4/27</a:t>
+              <a:t>2026/5/13</a:t>
             </a:fld>
             <a:endParaRPr kumimoji="1" lang="ja-JP" altLang="en-US"/>
           </a:p>
@@ -2972,7 +2972,7 @@
           <a:p>
             <a:fld id="{E9CC885B-4903-4D54-9A93-00025F12DED9}" type="datetimeFigureOut">
               <a:rPr kumimoji="1" lang="ja-JP" altLang="en-US" smtClean="0"/>
-              <a:t>2026/4/27</a:t>
+              <a:t>2026/5/13</a:t>
             </a:fld>
             <a:endParaRPr kumimoji="1" lang="ja-JP" altLang="en-US"/>
           </a:p>
@@ -3245,7 +3245,7 @@
           <a:p>
             <a:fld id="{E9CC885B-4903-4D54-9A93-00025F12DED9}" type="datetimeFigureOut">
               <a:rPr kumimoji="1" lang="ja-JP" altLang="en-US" smtClean="0"/>
-              <a:t>2026/4/27</a:t>
+              <a:t>2026/5/13</a:t>
             </a:fld>
             <a:endParaRPr kumimoji="1" lang="ja-JP" altLang="en-US"/>
           </a:p>
@@ -10697,8 +10697,42 @@
           </a:p>
           <a:p>
             <a:r>
+              <a:rPr lang="ja-JP" altLang="en-US" sz="2400" b="1" dirty="0">
+                <a:solidFill>
+                  <a:srgbClr val="FF0000"/>
+                </a:solidFill>
+              </a:rPr>
+              <a:t>敵専用の設定やギミック専用の設定が</a:t>
+            </a:r>
+            <a:r>
+              <a:rPr lang="en-US" altLang="ja-JP" sz="2400" b="1" dirty="0">
+                <a:solidFill>
+                  <a:srgbClr val="FF0000"/>
+                </a:solidFill>
+              </a:rPr>
+              <a:t>Unity</a:t>
+            </a:r>
+            <a:r>
+              <a:rPr lang="ja-JP" altLang="en-US" sz="2400" b="1" dirty="0">
+                <a:solidFill>
+                  <a:srgbClr val="FF0000"/>
+                </a:solidFill>
+              </a:rPr>
+              <a:t>でできる</a:t>
+            </a:r>
+            <a:r>
               <a:rPr lang="ja-JP" altLang="en-US" sz="2400" dirty="0"/>
-              <a:t>敵専用の設定やギミック専用の設定が</a:t>
+              <a:t>と更に制作が捗ります。</a:t>
+            </a:r>
+            <a:endParaRPr lang="en-US" altLang="ja-JP" sz="2400" dirty="0"/>
+          </a:p>
+          <a:p>
+            <a:endParaRPr lang="en-US" altLang="ja-JP" sz="2400" dirty="0"/>
+          </a:p>
+          <a:p>
+            <a:r>
+              <a:rPr lang="ja-JP" altLang="en-US" sz="2400" dirty="0"/>
+              <a:t>たとえば</a:t>
             </a:r>
             <a:r>
               <a:rPr lang="en-US" altLang="ja-JP" sz="2400" dirty="0"/>
@@ -10706,24 +10740,6 @@
             </a:r>
             <a:r>
               <a:rPr lang="ja-JP" altLang="en-US" sz="2400" dirty="0"/>
-              <a:t>でできると更に制作が捗ります。</a:t>
-            </a:r>
-            <a:endParaRPr lang="en-US" altLang="ja-JP" sz="2400" dirty="0"/>
-          </a:p>
-          <a:p>
-            <a:endParaRPr lang="en-US" altLang="ja-JP" sz="2400" dirty="0"/>
-          </a:p>
-          <a:p>
-            <a:r>
-              <a:rPr lang="ja-JP" altLang="en-US" sz="2400" dirty="0"/>
-              <a:t>たとえば</a:t>
-            </a:r>
-            <a:r>
-              <a:rPr lang="en-US" altLang="ja-JP" sz="2400" dirty="0"/>
-              <a:t>Unity</a:t>
-            </a:r>
-            <a:r>
-              <a:rPr lang="ja-JP" altLang="en-US" sz="2400" dirty="0"/>
               <a:t>側で、</a:t>
             </a:r>
             <a:endParaRPr lang="en-US" altLang="ja-JP" sz="2400" dirty="0"/>
@@ -10734,7 +10750,11 @@
               <a:t>・</a:t>
             </a:r>
             <a:r>
-              <a:rPr lang="en-US" altLang="ja-JP" sz="2400" dirty="0" err="1"/>
+              <a:rPr lang="en-US" altLang="ja-JP" sz="2400" b="1" dirty="0" err="1">
+                <a:solidFill>
+                  <a:srgbClr val="FF0000"/>
+                </a:solidFill>
+              </a:rPr>
               <a:t>StageObject.cs</a:t>
             </a:r>
             <a:r>
@@ -10742,7 +10762,11 @@
               <a:t>の他にも</a:t>
             </a:r>
             <a:r>
-              <a:rPr lang="en-US" altLang="ja-JP" sz="2400" dirty="0" err="1"/>
+              <a:rPr lang="en-US" altLang="ja-JP" sz="2400" b="1" dirty="0" err="1">
+                <a:solidFill>
+                  <a:srgbClr val="FF0000"/>
+                </a:solidFill>
+              </a:rPr>
               <a:t>EnemyObject.cs</a:t>
             </a:r>
             <a:r>
@@ -10750,7 +10774,11 @@
               <a:t>や</a:t>
             </a:r>
             <a:r>
-              <a:rPr lang="en-US" altLang="ja-JP" sz="2400" dirty="0" err="1"/>
+              <a:rPr lang="en-US" altLang="ja-JP" sz="2400" b="1" dirty="0" err="1">
+                <a:solidFill>
+                  <a:srgbClr val="FF0000"/>
+                </a:solidFill>
+              </a:rPr>
               <a:t>GimmickObject.cs</a:t>
             </a:r>
             <a:r>
